--- a/Domingo-21/S02_Domingo-21_1_Post_Feliz-Dia-del-Padre_4x5.pptx
+++ b/Domingo-21/S02_Domingo-21_1_Post_Feliz-Dia-del-Padre_4x5.pptx
@@ -3369,7 +3369,7 @@
         <p:spPr>
           <a:xfrm>
             <a:off x="777240" y="6924294"/>
-            <a:ext cx="6675120" cy="1530858"/>
+            <a:ext cx="6675120" cy="1943608"/>
           </a:xfrm>
           <a:prstGeom prst="rect">
             <a:avLst/>
@@ -3394,7 +3394,7 @@
                 </a:solidFill>
                 <a:latin typeface="Inter"/>
               </a:rPr>
-              <a:t>Un poder, un testamento: a veces el regalo es tranquilidad.</a:t>
+              <a:t>Un poder, un testamento: a veces el regalo es tranquilidad. notaly.com.ve</a:t>
             </a:r>
           </a:p>
         </p:txBody>
